--- a/ppt/sejourn1.pptx
+++ b/ppt/sejourn1.pptx
@@ -3778,14 +3778,14 @@
           <p:nvPr>
             <p:extLst>
               <p:ext uri="{D42A27DB-BD31-4B8C-83A1-F6EECF244321}">
-                <p14:modId xmlns:p14="http://schemas.microsoft.com/office/powerpoint/2010/main" val="2131253248"/>
+                <p14:modId xmlns:p14="http://schemas.microsoft.com/office/powerpoint/2010/main" val="1196389613"/>
               </p:ext>
             </p:extLst>
           </p:nvPr>
         </p:nvGraphicFramePr>
         <p:xfrm>
           <a:off x="5824699" y="722203"/>
-          <a:ext cx="6103565" cy="5168607"/>
+          <a:ext cx="6103565" cy="5954170"/>
         </p:xfrm>
         <a:graphic>
           <a:graphicData uri="http://schemas.openxmlformats.org/drawingml/2006/table">
@@ -3808,14 +3808,14 @@
                     </a:ext>
                   </a:extLst>
                 </a:gridCol>
-                <a:gridCol w="1816274">
+                <a:gridCol w="1590805">
                   <a:extLst>
                     <a:ext uri="{9D8B030D-6E8A-4147-A177-3AD203B41FA5}">
                       <a16:colId xmlns:a16="http://schemas.microsoft.com/office/drawing/2014/main" val="1524678273"/>
                     </a:ext>
                   </a:extLst>
                 </a:gridCol>
-                <a:gridCol w="1556713">
+                <a:gridCol w="1782182">
                   <a:extLst>
                     <a:ext uri="{9D8B030D-6E8A-4147-A177-3AD203B41FA5}">
                       <a16:colId xmlns:a16="http://schemas.microsoft.com/office/drawing/2014/main" val="1133467424"/>
@@ -3823,7 +3823,7 @@
                   </a:extLst>
                 </a:gridCol>
               </a:tblGrid>
-              <a:tr h="347628">
+              <a:tr h="421351">
                 <a:tc>
                   <a:txBody>
                     <a:bodyPr/>
@@ -3882,7 +3882,7 @@
                   </a:ext>
                 </a:extLst>
               </a:tr>
-              <a:tr h="205592">
+              <a:tr h="316013">
                 <a:tc>
                   <a:txBody>
                     <a:bodyPr/>
@@ -3975,7 +3975,7 @@
                   </a:ext>
                 </a:extLst>
               </a:tr>
-              <a:tr h="1794276">
+              <a:tr h="2066983">
                 <a:tc>
                   <a:txBody>
                     <a:bodyPr/>
@@ -4003,8 +4003,12 @@
                     <a:p>
                       <a:pPr algn="ctr"/>
                       <a:r>
-                        <a:rPr lang="fr-FR" sz="1200" dirty="0"/>
-                        <a:t>2m</a:t>
+                        <a:rPr lang="fr-FR" sz="1200" dirty="0">
+                          <a:solidFill>
+                            <a:schemeClr val="accent1"/>
+                          </a:solidFill>
+                        </a:rPr>
+                        <a:t>2m – Site 1</a:t>
                       </a:r>
                     </a:p>
                     <a:p>
@@ -4016,7 +4020,7 @@
                     <a:p>
                       <a:r>
                         <a:rPr lang="fr-FR" sz="1200" dirty="0"/>
-                        <a:t>B.C</a:t>
+                        <a:t>V.E.P</a:t>
                       </a:r>
                     </a:p>
                     <a:p>
@@ -4062,27 +4066,31 @@
                       </a:pPr>
                       <a:r>
                         <a:rPr lang="fr-FR" sz="1200" dirty="0"/>
-                        <a:t>remontée </a:t>
+                        <a:t>Evo palanquée </a:t>
                       </a:r>
                     </a:p>
                     <a:p>
                       <a:r>
                         <a:rPr lang="fr-FR" sz="1200" dirty="0"/>
-                        <a:t>Dissociation </a:t>
-                      </a:r>
-                      <a:r>
-                        <a:rPr lang="fr-FR" sz="1200" dirty="0" err="1"/>
-                        <a:t>buc</a:t>
-                      </a:r>
-                      <a:r>
-                        <a:rPr lang="fr-FR" sz="1200" dirty="0"/>
-                        <a:t>.</a:t>
+                        <a:t>D.B.N</a:t>
                       </a:r>
                     </a:p>
                     <a:p>
                       <a:r>
                         <a:rPr lang="fr-FR" sz="1200" dirty="0"/>
-                        <a:t>Echange embout</a:t>
+                        <a:t>L.R.E</a:t>
+                      </a:r>
+                    </a:p>
+                    <a:p>
+                      <a:r>
+                        <a:rPr lang="fr-FR" sz="1200" dirty="0"/>
+                        <a:t>Signes</a:t>
+                      </a:r>
+                    </a:p>
+                    <a:p>
+                      <a:r>
+                        <a:rPr lang="fr-FR" sz="1200" dirty="0"/>
+                        <a:t>Bio</a:t>
                       </a:r>
                     </a:p>
                   </a:txBody>
@@ -4102,16 +4110,21 @@
                     <a:p>
                       <a:pPr algn="ctr"/>
                       <a:r>
-                        <a:rPr lang="fr-FR" sz="1200" dirty="0"/>
-                        <a:t>6 m</a:t>
+                        <a:rPr lang="fr-FR" sz="1200" dirty="0">
+                          <a:solidFill>
+                            <a:schemeClr val="accent1"/>
+                          </a:solidFill>
+                        </a:rPr>
+                        <a:t>6 m – Site 3</a:t>
                       </a:r>
                     </a:p>
                     <a:p>
-                      <a:pPr algn="l"/>
-                      <a:r>
-                        <a:rPr lang="fr-FR" sz="1200" dirty="0"/>
-                        <a:t>Signe</a:t>
-                      </a:r>
+                      <a:pPr algn="ctr"/>
+                      <a:endParaRPr lang="fr-FR" sz="1200" dirty="0">
+                        <a:solidFill>
+                          <a:schemeClr val="accent1"/>
+                        </a:solidFill>
+                      </a:endParaRPr>
                     </a:p>
                     <a:p>
                       <a:pPr algn="l"/>
@@ -4124,7 +4137,7 @@
                       <a:pPr algn="l"/>
                       <a:r>
                         <a:rPr lang="fr-FR" sz="1200" dirty="0"/>
-                        <a:t>B.C.++</a:t>
+                        <a:t>B.C.+</a:t>
                       </a:r>
                     </a:p>
                   </a:txBody>
@@ -4135,24 +4148,54 @@
                     <a:bodyPr/>
                     <a:lstStyle/>
                     <a:p>
-                      <a:pPr algn="l"/>
+                      <a:pPr algn="ctr"/>
                       <a:r>
                         <a:rPr lang="fr-FR" sz="1200" dirty="0"/>
                         <a:t>Plongée 5</a:t>
                       </a:r>
                     </a:p>
                     <a:p>
-                      <a:pPr algn="l"/>
+                      <a:pPr algn="ctr"/>
                       <a:r>
-                        <a:rPr lang="fr-FR" sz="1200" dirty="0"/>
-                        <a:t>6 m</a:t>
+                        <a:rPr lang="fr-FR" sz="1200" dirty="0">
+                          <a:solidFill>
+                            <a:schemeClr val="accent1">
+                              <a:lumMod val="75000"/>
+                            </a:schemeClr>
+                          </a:solidFill>
+                        </a:rPr>
+                        <a:t>6m / </a:t>
                       </a:r>
+                      <a:r>
+                        <a:rPr lang="fr-FR" sz="1200" dirty="0">
+                          <a:solidFill>
+                            <a:schemeClr val="accent5">
+                              <a:lumMod val="75000"/>
+                            </a:schemeClr>
+                          </a:solidFill>
+                        </a:rPr>
+                        <a:t>12m</a:t>
+                      </a:r>
+                      <a:r>
+                        <a:rPr lang="fr-FR" sz="1200" dirty="0">
+                          <a:solidFill>
+                            <a:schemeClr val="accent1">
+                              <a:lumMod val="75000"/>
+                            </a:schemeClr>
+                          </a:solidFill>
+                        </a:rPr>
+                        <a:t> – Site 5</a:t>
+                      </a:r>
+                    </a:p>
+                    <a:p>
+                      <a:pPr algn="ctr"/>
+                      <a:endParaRPr lang="fr-FR" sz="1200" dirty="0"/>
                     </a:p>
                     <a:p>
                       <a:pPr algn="l"/>
                       <a:r>
                         <a:rPr lang="fr-FR" sz="1200" dirty="0"/>
-                        <a:t>B.C++++</a:t>
+                        <a:t>B.C+++</a:t>
                       </a:r>
                     </a:p>
                   </a:txBody>
@@ -4164,7 +4207,7 @@
                   </a:ext>
                 </a:extLst>
               </a:tr>
-              <a:tr h="246239">
+              <a:tr h="316013">
                 <a:tc>
                   <a:txBody>
                     <a:bodyPr/>
@@ -4223,7 +4266,7 @@
                   </a:ext>
                 </a:extLst>
               </a:tr>
-              <a:tr h="1810699">
+              <a:tr h="2085902">
                 <a:tc>
                   <a:txBody>
                     <a:bodyPr/>
@@ -4251,9 +4294,21 @@
                     <a:p>
                       <a:pPr algn="ctr"/>
                       <a:r>
-                        <a:rPr lang="fr-FR" sz="1200" dirty="0"/>
-                        <a:t>2m</a:t>
+                        <a:rPr lang="fr-FR" sz="1200" dirty="0">
+                          <a:solidFill>
+                            <a:schemeClr val="accent1"/>
+                          </a:solidFill>
+                        </a:rPr>
+                        <a:t>2m – Site 2</a:t>
                       </a:r>
+                    </a:p>
+                    <a:p>
+                      <a:pPr algn="ctr"/>
+                      <a:endParaRPr lang="fr-FR" sz="1200" dirty="0">
+                        <a:solidFill>
+                          <a:schemeClr val="accent1"/>
+                        </a:solidFill>
+                      </a:endParaRPr>
                     </a:p>
                     <a:p>
                       <a:r>
@@ -4264,7 +4319,7 @@
                     <a:p>
                       <a:r>
                         <a:rPr lang="fr-FR" sz="1200" dirty="0"/>
-                        <a:t>B.C.+</a:t>
+                        <a:t>B.C.</a:t>
                       </a:r>
                     </a:p>
                     <a:p>
@@ -4296,15 +4351,31 @@
                     <a:p>
                       <a:pPr algn="ctr"/>
                       <a:r>
-                        <a:rPr lang="fr-FR" sz="1200" dirty="0"/>
-                        <a:t>6 m</a:t>
+                        <a:rPr lang="fr-FR" sz="1200" dirty="0">
+                          <a:solidFill>
+                            <a:schemeClr val="accent1">
+                              <a:lumMod val="75000"/>
+                            </a:schemeClr>
+                          </a:solidFill>
+                        </a:rPr>
+                        <a:t>6 m – Site 4</a:t>
                       </a:r>
+                    </a:p>
+                    <a:p>
+                      <a:pPr algn="ctr"/>
+                      <a:endParaRPr lang="fr-FR" sz="1200" dirty="0">
+                        <a:solidFill>
+                          <a:schemeClr val="accent1">
+                            <a:lumMod val="75000"/>
+                          </a:schemeClr>
+                        </a:solidFill>
+                      </a:endParaRPr>
                     </a:p>
                     <a:p>
                       <a:pPr algn="l"/>
                       <a:r>
                         <a:rPr lang="fr-FR" sz="1200" dirty="0"/>
-                        <a:t>B.C+++</a:t>
+                        <a:t>B.C++</a:t>
                       </a:r>
                     </a:p>
                   </a:txBody>
@@ -4322,17 +4393,67 @@
                       </a:r>
                     </a:p>
                     <a:p>
-                      <a:pPr algn="ctr"/>
+                      <a:pPr marL="0" marR="0" lvl="0" indent="0" algn="ctr" defTabSz="914400" rtl="0" eaLnBrk="1" fontAlgn="auto" latinLnBrk="0" hangingPunct="1">
+                        <a:lnSpc>
+                          <a:spcPct val="100000"/>
+                        </a:lnSpc>
+                        <a:spcBef>
+                          <a:spcPts val="0"/>
+                        </a:spcBef>
+                        <a:spcAft>
+                          <a:spcPts val="0"/>
+                        </a:spcAft>
+                        <a:buClrTx/>
+                        <a:buSzTx/>
+                        <a:buFontTx/>
+                        <a:buNone/>
+                        <a:tabLst/>
+                        <a:defRPr/>
+                      </a:pPr>
                       <a:r>
                         <a:rPr lang="fr-FR" sz="1200" dirty="0"/>
-                        <a:t> 6 m</a:t>
+                        <a:t> </a:t>
                       </a:r>
+                      <a:r>
+                        <a:rPr lang="fr-FR" sz="1200" dirty="0">
+                          <a:solidFill>
+                            <a:schemeClr val="accent1">
+                              <a:lumMod val="75000"/>
+                            </a:schemeClr>
+                          </a:solidFill>
+                        </a:rPr>
+                        <a:t>6m / </a:t>
+                      </a:r>
+                      <a:r>
+                        <a:rPr lang="fr-FR" sz="1200" dirty="0">
+                          <a:solidFill>
+                            <a:schemeClr val="accent5">
+                              <a:lumMod val="75000"/>
+                            </a:schemeClr>
+                          </a:solidFill>
+                        </a:rPr>
+                        <a:t>12m</a:t>
+                      </a:r>
+                      <a:r>
+                        <a:rPr lang="fr-FR" sz="1200" dirty="0">
+                          <a:solidFill>
+                            <a:schemeClr val="accent1">
+                              <a:lumMod val="75000"/>
+                            </a:schemeClr>
+                          </a:solidFill>
+                        </a:rPr>
+                        <a:t> – Site 6</a:t>
+                      </a:r>
+                    </a:p>
+                    <a:p>
+                      <a:pPr algn="ctr"/>
+                      <a:endParaRPr lang="fr-FR" sz="1200" dirty="0"/>
                     </a:p>
                     <a:p>
                       <a:pPr algn="l"/>
                       <a:r>
                         <a:rPr lang="fr-FR" sz="1200" dirty="0"/>
-                        <a:t>Bio</a:t>
+                        <a:t>Bio + V.E.P.</a:t>
                       </a:r>
                     </a:p>
                   </a:txBody>
@@ -4344,7 +4465,7 @@
                   </a:ext>
                 </a:extLst>
               </a:tr>
-              <a:tr h="324616">
+              <a:tr h="373954">
                 <a:tc>
                   <a:txBody>
                     <a:bodyPr/>
@@ -4365,7 +4486,7 @@
                     <a:p>
                       <a:r>
                         <a:rPr lang="fr-FR" sz="1200" dirty="0"/>
-                        <a:t>Debrief moniteurs</a:t>
+                        <a:t>Debrief moniteurs ====== </a:t>
                       </a:r>
                     </a:p>
                   </a:txBody>
@@ -4395,7 +4516,7 @@
                       </a:pPr>
                       <a:r>
                         <a:rPr lang="fr-FR" sz="1200" dirty="0"/>
-                        <a:t>Debrief moniteurs</a:t>
+                        <a:t>=================</a:t>
                       </a:r>
                     </a:p>
                   </a:txBody>
@@ -4425,7 +4546,17 @@
                       </a:pPr>
                       <a:r>
                         <a:rPr lang="fr-FR" sz="1200" dirty="0"/>
-                        <a:t>Debrief moniteurs</a:t>
+                        <a:t>=&gt; </a:t>
+                      </a:r>
+                      <a:r>
+                        <a:rPr lang="fr-FR" sz="1200" dirty="0">
+                          <a:solidFill>
+                            <a:schemeClr val="accent5">
+                              <a:lumMod val="75000"/>
+                            </a:schemeClr>
+                          </a:solidFill>
+                        </a:rPr>
+                        <a:t>Fiche évaluation</a:t>
                       </a:r>
                     </a:p>
                   </a:txBody>
@@ -4437,7 +4568,7 @@
                   </a:ext>
                 </a:extLst>
               </a:tr>
-              <a:tr h="324616">
+              <a:tr h="373954">
                 <a:tc>
                   <a:txBody>
                     <a:bodyPr/>
@@ -4565,7 +4696,7 @@
             <a:pPr algn="ctr"/>
             <a:r>
               <a:rPr lang="fr-FR" dirty="0"/>
-              <a:t>Séjour validation N1 pour 4 baptisés</a:t>
+              <a:t>Séjour validation N1 pour 4 baptisés sur 3 jours</a:t>
             </a:r>
           </a:p>
         </p:txBody>
@@ -4859,10 +4990,10 @@
       </p:sp>
       <p:sp>
         <p:nvSpPr>
-          <p:cNvPr id="20" name="ZoneTexte 19">
-            <a:extLst>
-              <a:ext uri="{FF2B5EF4-FFF2-40B4-BE49-F238E27FC236}">
-                <a16:creationId xmlns:a16="http://schemas.microsoft.com/office/drawing/2014/main" id="{4168F553-E8FD-1D63-72AA-9D4B9053FA2D}"/>
+          <p:cNvPr id="22" name="ZoneTexte 21">
+            <a:extLst>
+              <a:ext uri="{FF2B5EF4-FFF2-40B4-BE49-F238E27FC236}">
+                <a16:creationId xmlns:a16="http://schemas.microsoft.com/office/drawing/2014/main" id="{AB42E386-3486-54DD-0A6F-D435B0D2EA6C}"/>
               </a:ext>
             </a:extLst>
           </p:cNvPr>
@@ -4871,256 +5002,8 @@
         </p:nvSpPr>
         <p:spPr>
           <a:xfrm>
-            <a:off x="327864" y="99033"/>
-            <a:ext cx="3059684" cy="5293757"/>
-          </a:xfrm>
-          <a:prstGeom prst="rect">
-            <a:avLst/>
-          </a:prstGeom>
-          <a:solidFill>
-            <a:schemeClr val="accent2">
-              <a:lumMod val="20000"/>
-              <a:lumOff val="80000"/>
-            </a:schemeClr>
-          </a:solidFill>
-          <a:ln>
-            <a:solidFill>
-              <a:schemeClr val="accent2">
-                <a:lumMod val="75000"/>
-              </a:schemeClr>
-            </a:solidFill>
-          </a:ln>
-        </p:spPr>
-        <p:txBody>
-          <a:bodyPr wrap="none" rtlCol="0">
-            <a:spAutoFit/>
-          </a:bodyPr>
-          <a:lstStyle/>
-          <a:p>
-            <a:pPr algn="ctr"/>
-            <a:r>
-              <a:rPr lang="fr-FR" b="1" dirty="0"/>
-              <a:t>Présentation</a:t>
-            </a:r>
-          </a:p>
-          <a:p>
-            <a:pPr marL="285750" indent="-285750">
-              <a:buFont typeface="Arial" panose="020B0604020202020204" pitchFamily="34" charset="0"/>
-              <a:buChar char="•"/>
-            </a:pPr>
-            <a:r>
-              <a:rPr lang="fr-FR" sz="1600" dirty="0"/>
-              <a:t>Séjour</a:t>
-            </a:r>
-          </a:p>
-          <a:p>
-            <a:pPr marL="742950" lvl="1" indent="-285750">
-              <a:buFont typeface="Arial" panose="020B0604020202020204" pitchFamily="34" charset="0"/>
-              <a:buChar char="•"/>
-            </a:pPr>
-            <a:r>
-              <a:rPr lang="fr-FR" sz="1600" dirty="0"/>
-              <a:t>Objet</a:t>
-            </a:r>
-          </a:p>
-          <a:p>
-            <a:pPr marL="742950" lvl="1" indent="-285750">
-              <a:buFont typeface="Arial" panose="020B0604020202020204" pitchFamily="34" charset="0"/>
-              <a:buChar char="•"/>
-            </a:pPr>
-            <a:r>
-              <a:rPr lang="fr-FR" sz="1600" dirty="0"/>
-              <a:t>Lieu</a:t>
-            </a:r>
-          </a:p>
-          <a:p>
-            <a:pPr marL="742950" lvl="1" indent="-285750">
-              <a:buFont typeface="Arial" panose="020B0604020202020204" pitchFamily="34" charset="0"/>
-              <a:buChar char="•"/>
-            </a:pPr>
-            <a:r>
-              <a:rPr lang="fr-FR" sz="1600" dirty="0"/>
-              <a:t>Transport</a:t>
-            </a:r>
-          </a:p>
-          <a:p>
-            <a:pPr marL="742950" lvl="1" indent="-285750">
-              <a:buFont typeface="Arial" panose="020B0604020202020204" pitchFamily="34" charset="0"/>
-              <a:buChar char="•"/>
-            </a:pPr>
-            <a:r>
-              <a:rPr lang="fr-FR" sz="1600" dirty="0"/>
-              <a:t>Participants</a:t>
-            </a:r>
-          </a:p>
-          <a:p>
-            <a:pPr marL="285750" indent="-285750">
-              <a:buFont typeface="Arial" panose="020B0604020202020204" pitchFamily="34" charset="0"/>
-              <a:buChar char="•"/>
-            </a:pPr>
-            <a:r>
-              <a:rPr lang="fr-FR" sz="1600" dirty="0"/>
-              <a:t>Déroulement N1</a:t>
-            </a:r>
-          </a:p>
-          <a:p>
-            <a:pPr marL="742950" lvl="1" indent="-285750">
-              <a:buFont typeface="Arial" panose="020B0604020202020204" pitchFamily="34" charset="0"/>
-              <a:buChar char="•"/>
-            </a:pPr>
-            <a:r>
-              <a:rPr lang="fr-FR" sz="1600" dirty="0"/>
-              <a:t>Vendredi</a:t>
-            </a:r>
-          </a:p>
-          <a:p>
-            <a:pPr marL="1200150" lvl="2" indent="-285750">
-              <a:buFont typeface="Arial" panose="020B0604020202020204" pitchFamily="34" charset="0"/>
-              <a:buChar char="•"/>
-            </a:pPr>
-            <a:r>
-              <a:rPr lang="fr-FR" sz="1600" dirty="0"/>
-              <a:t>Voyage</a:t>
-            </a:r>
-          </a:p>
-          <a:p>
-            <a:pPr marL="1200150" lvl="2" indent="-285750">
-              <a:buFont typeface="Arial" panose="020B0604020202020204" pitchFamily="34" charset="0"/>
-              <a:buChar char="•"/>
-            </a:pPr>
-            <a:r>
-              <a:rPr lang="fr-FR" sz="1600" dirty="0"/>
-              <a:t>Accueil</a:t>
-            </a:r>
-          </a:p>
-          <a:p>
-            <a:pPr marL="1200150" lvl="2" indent="-285750">
-              <a:buFont typeface="Arial" panose="020B0604020202020204" pitchFamily="34" charset="0"/>
-              <a:buChar char="•"/>
-            </a:pPr>
-            <a:r>
-              <a:rPr lang="fr-FR" sz="1600" dirty="0"/>
-              <a:t>Matériel</a:t>
-            </a:r>
-          </a:p>
-          <a:p>
-            <a:pPr marL="742950" lvl="1" indent="-285750">
-              <a:buFont typeface="Arial" panose="020B0604020202020204" pitchFamily="34" charset="0"/>
-              <a:buChar char="•"/>
-            </a:pPr>
-            <a:r>
-              <a:rPr lang="fr-FR" sz="1600" dirty="0"/>
-              <a:t>Samedi</a:t>
-            </a:r>
-          </a:p>
-          <a:p>
-            <a:pPr marL="1200150" lvl="2" indent="-285750">
-              <a:buFont typeface="Arial" panose="020B0604020202020204" pitchFamily="34" charset="0"/>
-              <a:buChar char="•"/>
-            </a:pPr>
-            <a:r>
-              <a:rPr lang="fr-FR" sz="1600" dirty="0"/>
-              <a:t>formation</a:t>
-            </a:r>
-          </a:p>
-          <a:p>
-            <a:pPr marL="742950" lvl="1" indent="-285750">
-              <a:buFont typeface="Arial" panose="020B0604020202020204" pitchFamily="34" charset="0"/>
-              <a:buChar char="•"/>
-            </a:pPr>
-            <a:r>
-              <a:rPr lang="fr-FR" sz="1600" dirty="0"/>
-              <a:t>Dimanche</a:t>
-            </a:r>
-          </a:p>
-          <a:p>
-            <a:pPr marL="1200150" lvl="2" indent="-285750">
-              <a:buFont typeface="Arial" panose="020B0604020202020204" pitchFamily="34" charset="0"/>
-              <a:buChar char="•"/>
-            </a:pPr>
-            <a:r>
-              <a:rPr lang="fr-FR" sz="1600" dirty="0"/>
-              <a:t>formation</a:t>
-            </a:r>
-          </a:p>
-          <a:p>
-            <a:pPr marL="742950" lvl="1" indent="-285750">
-              <a:buFont typeface="Arial" panose="020B0604020202020204" pitchFamily="34" charset="0"/>
-              <a:buChar char="•"/>
-            </a:pPr>
-            <a:r>
-              <a:rPr lang="fr-FR" sz="1600" dirty="0"/>
-              <a:t>Lundi</a:t>
-            </a:r>
-          </a:p>
-          <a:p>
-            <a:pPr marL="1200150" lvl="2" indent="-285750">
-              <a:buFont typeface="Arial" panose="020B0604020202020204" pitchFamily="34" charset="0"/>
-              <a:buChar char="•"/>
-            </a:pPr>
-            <a:r>
-              <a:rPr lang="fr-FR" sz="1600" dirty="0"/>
-              <a:t>Formation</a:t>
-            </a:r>
-          </a:p>
-          <a:p>
-            <a:pPr marL="1200150" lvl="2" indent="-285750">
-              <a:buFont typeface="Arial" panose="020B0604020202020204" pitchFamily="34" charset="0"/>
-              <a:buChar char="•"/>
-            </a:pPr>
-            <a:r>
-              <a:rPr lang="fr-FR" sz="1600" dirty="0"/>
-              <a:t>Carnet de plongée</a:t>
-            </a:r>
-          </a:p>
-          <a:p>
-            <a:pPr marL="285750" indent="-285750">
-              <a:buFont typeface="Arial" panose="020B0604020202020204" pitchFamily="34" charset="0"/>
-              <a:buChar char="•"/>
-            </a:pPr>
-            <a:r>
-              <a:rPr lang="fr-FR" sz="1600" dirty="0"/>
-              <a:t>Après</a:t>
-            </a:r>
-          </a:p>
-          <a:p>
-            <a:pPr marL="742950" lvl="1" indent="-285750">
-              <a:buFont typeface="Arial" panose="020B0604020202020204" pitchFamily="34" charset="0"/>
-              <a:buChar char="•"/>
-            </a:pPr>
-            <a:r>
-              <a:rPr lang="fr-FR" sz="1600" dirty="0"/>
-              <a:t>Exploration jusqu’à 20m</a:t>
-            </a:r>
-          </a:p>
-          <a:p>
-            <a:pPr marL="742950" lvl="1" indent="-285750">
-              <a:buFont typeface="Arial" panose="020B0604020202020204" pitchFamily="34" charset="0"/>
-              <a:buChar char="•"/>
-            </a:pPr>
-            <a:r>
-              <a:rPr lang="fr-FR" sz="1600" dirty="0"/>
-              <a:t>retour</a:t>
-            </a:r>
-          </a:p>
-        </p:txBody>
-      </p:sp>
-      <p:sp>
-        <p:nvSpPr>
-          <p:cNvPr id="22" name="ZoneTexte 21">
-            <a:extLst>
-              <a:ext uri="{FF2B5EF4-FFF2-40B4-BE49-F238E27FC236}">
-                <a16:creationId xmlns:a16="http://schemas.microsoft.com/office/drawing/2014/main" id="{AB42E386-3486-54DD-0A6F-D435B0D2EA6C}"/>
-              </a:ext>
-            </a:extLst>
-          </p:cNvPr>
-          <p:cNvSpPr txBox="1"/>
-          <p:nvPr/>
-        </p:nvSpPr>
-        <p:spPr>
-          <a:xfrm>
-            <a:off x="3641433" y="744512"/>
-            <a:ext cx="1929380" cy="1107996"/>
+            <a:off x="2422616" y="722203"/>
+            <a:ext cx="3249814" cy="1107996"/>
           </a:xfrm>
           <a:prstGeom prst="rect">
             <a:avLst/>
@@ -5147,7 +5030,7 @@
             <a:pPr algn="ctr"/>
             <a:r>
               <a:rPr lang="fr-FR" dirty="0"/>
-              <a:t>B.C.</a:t>
+              <a:t>V.E.P</a:t>
             </a:r>
           </a:p>
           <a:p>
@@ -5196,7 +5079,7 @@
         </p:nvSpPr>
         <p:spPr>
           <a:xfrm>
-            <a:off x="9117394" y="1828379"/>
+            <a:off x="8964783" y="1986625"/>
             <a:ext cx="313151" cy="513988"/>
           </a:xfrm>
           <a:prstGeom prst="rightBrace">
@@ -5250,8 +5133,8 @@
         </p:nvSpPr>
         <p:spPr>
           <a:xfrm>
-            <a:off x="7035758" y="4005908"/>
-            <a:ext cx="313151" cy="513988"/>
+            <a:off x="7592717" y="4448068"/>
+            <a:ext cx="313151" cy="653592"/>
           </a:xfrm>
           <a:prstGeom prst="rightBrace">
             <a:avLst/>
@@ -5304,8 +5187,8 @@
         </p:nvSpPr>
         <p:spPr>
           <a:xfrm>
-            <a:off x="7696115" y="1896406"/>
-            <a:ext cx="311849" cy="984579"/>
+            <a:off x="7664117" y="2079320"/>
+            <a:ext cx="343848" cy="1349679"/>
           </a:xfrm>
           <a:prstGeom prst="rightBrace">
             <a:avLst/>
@@ -5358,7 +5241,46 @@
         </p:nvSpPr>
         <p:spPr>
           <a:xfrm>
-            <a:off x="8007964" y="2157701"/>
+            <a:off x="7959472" y="2569493"/>
+            <a:ext cx="484428" cy="369332"/>
+          </a:xfrm>
+          <a:prstGeom prst="rect">
+            <a:avLst/>
+          </a:prstGeom>
+          <a:noFill/>
+        </p:spPr>
+        <p:txBody>
+          <a:bodyPr wrap="none" rtlCol="0">
+            <a:spAutoFit/>
+          </a:bodyPr>
+          <a:lstStyle/>
+          <a:p>
+            <a:r>
+              <a:rPr lang="fr-FR" dirty="0">
+                <a:solidFill>
+                  <a:srgbClr val="C00000"/>
+                </a:solidFill>
+              </a:rPr>
+              <a:t>BC</a:t>
+            </a:r>
+          </a:p>
+        </p:txBody>
+      </p:sp>
+      <p:sp>
+        <p:nvSpPr>
+          <p:cNvPr id="11" name="ZoneTexte 10">
+            <a:extLst>
+              <a:ext uri="{FF2B5EF4-FFF2-40B4-BE49-F238E27FC236}">
+                <a16:creationId xmlns:a16="http://schemas.microsoft.com/office/drawing/2014/main" id="{9D7E7635-0D20-6D5E-6053-1F2015695344}"/>
+              </a:ext>
+            </a:extLst>
+          </p:cNvPr>
+          <p:cNvSpPr txBox="1"/>
+          <p:nvPr/>
+        </p:nvSpPr>
+        <p:spPr>
+          <a:xfrm>
+            <a:off x="7836041" y="4577205"/>
             <a:ext cx="607859" cy="369332"/>
           </a:xfrm>
           <a:prstGeom prst="rect">
@@ -5385,10 +5307,10 @@
       </p:sp>
       <p:sp>
         <p:nvSpPr>
-          <p:cNvPr id="11" name="ZoneTexte 10">
-            <a:extLst>
-              <a:ext uri="{FF2B5EF4-FFF2-40B4-BE49-F238E27FC236}">
-                <a16:creationId xmlns:a16="http://schemas.microsoft.com/office/drawing/2014/main" id="{9D7E7635-0D20-6D5E-6053-1F2015695344}"/>
+          <p:cNvPr id="13" name="ZoneTexte 12">
+            <a:extLst>
+              <a:ext uri="{FF2B5EF4-FFF2-40B4-BE49-F238E27FC236}">
+                <a16:creationId xmlns:a16="http://schemas.microsoft.com/office/drawing/2014/main" id="{996B6301-0BC6-F449-1D2A-94A5549385BF}"/>
               </a:ext>
             </a:extLst>
           </p:cNvPr>
@@ -5397,7 +5319,7 @@
         </p:nvSpPr>
         <p:spPr>
           <a:xfrm>
-            <a:off x="7330470" y="4078236"/>
+            <a:off x="9224546" y="2038828"/>
             <a:ext cx="731290" cy="369332"/>
           </a:xfrm>
           <a:prstGeom prst="rect">
@@ -5424,10 +5346,10 @@
       </p:sp>
       <p:sp>
         <p:nvSpPr>
-          <p:cNvPr id="13" name="ZoneTexte 12">
-            <a:extLst>
-              <a:ext uri="{FF2B5EF4-FFF2-40B4-BE49-F238E27FC236}">
-                <a16:creationId xmlns:a16="http://schemas.microsoft.com/office/drawing/2014/main" id="{996B6301-0BC6-F449-1D2A-94A5549385BF}"/>
+          <p:cNvPr id="18" name="ZoneTexte 17">
+            <a:extLst>
+              <a:ext uri="{FF2B5EF4-FFF2-40B4-BE49-F238E27FC236}">
+                <a16:creationId xmlns:a16="http://schemas.microsoft.com/office/drawing/2014/main" id="{DD82E7A0-C1E2-22F8-2188-D73BC1DDD822}"/>
               </a:ext>
             </a:extLst>
           </p:cNvPr>
@@ -5436,47 +5358,8 @@
         </p:nvSpPr>
         <p:spPr>
           <a:xfrm>
-            <a:off x="9430545" y="1896407"/>
-            <a:ext cx="854721" cy="369332"/>
-          </a:xfrm>
-          <a:prstGeom prst="rect">
-            <a:avLst/>
-          </a:prstGeom>
-          <a:noFill/>
-        </p:spPr>
-        <p:txBody>
-          <a:bodyPr wrap="none" rtlCol="0">
-            <a:spAutoFit/>
-          </a:bodyPr>
-          <a:lstStyle/>
-          <a:p>
-            <a:r>
-              <a:rPr lang="fr-FR" dirty="0">
-                <a:solidFill>
-                  <a:srgbClr val="C00000"/>
-                </a:solidFill>
-              </a:rPr>
-              <a:t>BC+++</a:t>
-            </a:r>
-          </a:p>
-        </p:txBody>
-      </p:sp>
-      <p:sp>
-        <p:nvSpPr>
-          <p:cNvPr id="18" name="ZoneTexte 17">
-            <a:extLst>
-              <a:ext uri="{FF2B5EF4-FFF2-40B4-BE49-F238E27FC236}">
-                <a16:creationId xmlns:a16="http://schemas.microsoft.com/office/drawing/2014/main" id="{DD82E7A0-C1E2-22F8-2188-D73BC1DDD822}"/>
-              </a:ext>
-            </a:extLst>
-          </p:cNvPr>
-          <p:cNvSpPr txBox="1"/>
-          <p:nvPr/>
-        </p:nvSpPr>
-        <p:spPr>
-          <a:xfrm>
-            <a:off x="3641433" y="2013099"/>
-            <a:ext cx="1929380" cy="1107996"/>
+            <a:off x="163679" y="4119775"/>
+            <a:ext cx="5504493" cy="1354217"/>
           </a:xfrm>
           <a:prstGeom prst="rect">
             <a:avLst/>
@@ -5505,8 +5388,9 @@
             <a:pPr algn="ctr"/>
             <a:r>
               <a:rPr lang="fr-FR" dirty="0"/>
-              <a:t>Théorie</a:t>
-            </a:r>
+              <a:t>Théorie (Ateliers oraux)</a:t>
+            </a:r>
+            <a:endParaRPr lang="fr-FR" sz="1600" dirty="0"/>
           </a:p>
           <a:p>
             <a:pPr marL="285750" indent="-285750">
@@ -5515,7 +5399,17 @@
             </a:pPr>
             <a:r>
               <a:rPr lang="fr-FR" sz="1600" dirty="0"/>
-              <a:t>Ateliers oraux</a:t>
+              <a:t>Sur le bateau</a:t>
+            </a:r>
+          </a:p>
+          <a:p>
+            <a:pPr marL="285750" indent="-285750">
+              <a:buFont typeface="Arial" panose="020B0604020202020204" pitchFamily="34" charset="0"/>
+              <a:buChar char="•"/>
+            </a:pPr>
+            <a:r>
+              <a:rPr lang="fr-FR" sz="1600" dirty="0"/>
+              <a:t>Le soir</a:t>
             </a:r>
           </a:p>
           <a:p>
@@ -5525,17 +5419,7 @@
             </a:pPr>
             <a:r>
               <a:rPr lang="fr-FR" sz="1600" dirty="0"/>
-              <a:t>Bateau</a:t>
-            </a:r>
-          </a:p>
-          <a:p>
-            <a:pPr marL="742950" lvl="1" indent="-285750">
-              <a:buFont typeface="Arial" panose="020B0604020202020204" pitchFamily="34" charset="0"/>
-              <a:buChar char="•"/>
-            </a:pPr>
-            <a:r>
-              <a:rPr lang="fr-FR" sz="1600" dirty="0"/>
-              <a:t>Le soir</a:t>
+              <a:t>Avec notamment le carnet de plongée (papier et numérique)</a:t>
             </a:r>
           </a:p>
         </p:txBody>
@@ -5554,8 +5438,8 @@
         </p:nvSpPr>
         <p:spPr>
           <a:xfrm>
-            <a:off x="3629328" y="3328800"/>
-            <a:ext cx="1929380" cy="1354217"/>
+            <a:off x="163680" y="728350"/>
+            <a:ext cx="2072484" cy="1354217"/>
           </a:xfrm>
           <a:prstGeom prst="rect">
             <a:avLst/>
@@ -5625,6 +5509,234 @@
             <a:r>
               <a:rPr lang="fr-FR" sz="1600" dirty="0"/>
               <a:t>2 E2</a:t>
+            </a:r>
+          </a:p>
+        </p:txBody>
+      </p:sp>
+      <p:cxnSp>
+        <p:nvCxnSpPr>
+          <p:cNvPr id="23" name="Connecteur droit avec flèche 22">
+            <a:extLst>
+              <a:ext uri="{FF2B5EF4-FFF2-40B4-BE49-F238E27FC236}">
+                <a16:creationId xmlns:a16="http://schemas.microsoft.com/office/drawing/2014/main" id="{3AA13116-3CA2-F89C-6D2A-38A0DBA4EBB4}"/>
+              </a:ext>
+            </a:extLst>
+          </p:cNvPr>
+          <p:cNvCxnSpPr/>
+          <p:nvPr/>
+        </p:nvCxnSpPr>
+        <p:spPr>
+          <a:xfrm flipH="1" flipV="1">
+            <a:off x="10997852" y="4233797"/>
+            <a:ext cx="87682" cy="1716066"/>
+          </a:xfrm>
+          <a:prstGeom prst="straightConnector1">
+            <a:avLst/>
+          </a:prstGeom>
+          <a:ln>
+            <a:solidFill>
+              <a:schemeClr val="accent5">
+                <a:lumMod val="75000"/>
+              </a:schemeClr>
+            </a:solidFill>
+            <a:tailEnd type="triangle"/>
+          </a:ln>
+        </p:spPr>
+        <p:style>
+          <a:lnRef idx="2">
+            <a:schemeClr val="accent1"/>
+          </a:lnRef>
+          <a:fillRef idx="0">
+            <a:schemeClr val="accent1"/>
+          </a:fillRef>
+          <a:effectRef idx="1">
+            <a:schemeClr val="accent1"/>
+          </a:effectRef>
+          <a:fontRef idx="minor">
+            <a:schemeClr val="tx1"/>
+          </a:fontRef>
+        </p:style>
+      </p:cxnSp>
+      <p:cxnSp>
+        <p:nvCxnSpPr>
+          <p:cNvPr id="24" name="Connecteur droit avec flèche 23">
+            <a:extLst>
+              <a:ext uri="{FF2B5EF4-FFF2-40B4-BE49-F238E27FC236}">
+                <a16:creationId xmlns:a16="http://schemas.microsoft.com/office/drawing/2014/main" id="{5CBCF5E3-8D1E-DE97-C1BE-1FB0054269A9}"/>
+              </a:ext>
+            </a:extLst>
+          </p:cNvPr>
+          <p:cNvCxnSpPr>
+            <a:cxnSpLocks/>
+          </p:cNvCxnSpPr>
+          <p:nvPr/>
+        </p:nvCxnSpPr>
+        <p:spPr>
+          <a:xfrm flipH="1" flipV="1">
+            <a:off x="10997852" y="1853852"/>
+            <a:ext cx="187890" cy="4096011"/>
+          </a:xfrm>
+          <a:prstGeom prst="straightConnector1">
+            <a:avLst/>
+          </a:prstGeom>
+          <a:ln>
+            <a:solidFill>
+              <a:schemeClr val="accent5">
+                <a:lumMod val="75000"/>
+              </a:schemeClr>
+            </a:solidFill>
+            <a:tailEnd type="triangle"/>
+          </a:ln>
+        </p:spPr>
+        <p:style>
+          <a:lnRef idx="2">
+            <a:schemeClr val="accent1"/>
+          </a:lnRef>
+          <a:fillRef idx="0">
+            <a:schemeClr val="accent1"/>
+          </a:fillRef>
+          <a:effectRef idx="1">
+            <a:schemeClr val="accent1"/>
+          </a:effectRef>
+          <a:fontRef idx="minor">
+            <a:schemeClr val="tx1"/>
+          </a:fontRef>
+        </p:style>
+      </p:cxnSp>
+      <p:sp>
+        <p:nvSpPr>
+          <p:cNvPr id="27" name="ZoneTexte 26">
+            <a:extLst>
+              <a:ext uri="{FF2B5EF4-FFF2-40B4-BE49-F238E27FC236}">
+                <a16:creationId xmlns:a16="http://schemas.microsoft.com/office/drawing/2014/main" id="{B5C91540-D5A6-6D8D-4A3E-2372A728484A}"/>
+              </a:ext>
+            </a:extLst>
+          </p:cNvPr>
+          <p:cNvSpPr txBox="1"/>
+          <p:nvPr/>
+        </p:nvSpPr>
+        <p:spPr>
+          <a:xfrm>
+            <a:off x="9768721" y="4962056"/>
+            <a:ext cx="2140781" cy="461665"/>
+          </a:xfrm>
+          <a:prstGeom prst="rect">
+            <a:avLst/>
+          </a:prstGeom>
+          <a:solidFill>
+            <a:schemeClr val="accent5">
+              <a:lumMod val="20000"/>
+              <a:lumOff val="80000"/>
+            </a:schemeClr>
+          </a:solidFill>
+          <a:ln>
+            <a:solidFill>
+              <a:schemeClr val="accent5">
+                <a:lumMod val="75000"/>
+              </a:schemeClr>
+            </a:solidFill>
+          </a:ln>
+        </p:spPr>
+        <p:txBody>
+          <a:bodyPr wrap="square" rtlCol="0">
+            <a:spAutoFit/>
+          </a:bodyPr>
+          <a:lstStyle/>
+          <a:p>
+            <a:r>
+              <a:rPr lang="fr-FR" sz="1200" dirty="0"/>
+              <a:t>Autorisation possible par DP selon validations de la fiche</a:t>
+            </a:r>
+          </a:p>
+        </p:txBody>
+      </p:sp>
+      <p:sp>
+        <p:nvSpPr>
+          <p:cNvPr id="28" name="ZoneTexte 27">
+            <a:extLst>
+              <a:ext uri="{FF2B5EF4-FFF2-40B4-BE49-F238E27FC236}">
+                <a16:creationId xmlns:a16="http://schemas.microsoft.com/office/drawing/2014/main" id="{FD9F9D01-DBF0-11A1-CBDC-08F143CF8ADE}"/>
+              </a:ext>
+            </a:extLst>
+          </p:cNvPr>
+          <p:cNvSpPr txBox="1"/>
+          <p:nvPr/>
+        </p:nvSpPr>
+        <p:spPr>
+          <a:xfrm>
+            <a:off x="2422616" y="1953295"/>
+            <a:ext cx="3249815" cy="2031325"/>
+          </a:xfrm>
+          <a:prstGeom prst="rect">
+            <a:avLst/>
+          </a:prstGeom>
+          <a:solidFill>
+            <a:schemeClr val="accent2">
+              <a:lumMod val="20000"/>
+              <a:lumOff val="80000"/>
+            </a:schemeClr>
+          </a:solidFill>
+          <a:ln>
+            <a:solidFill>
+              <a:srgbClr val="C00000"/>
+            </a:solidFill>
+          </a:ln>
+        </p:spPr>
+        <p:txBody>
+          <a:bodyPr wrap="square" rtlCol="0">
+            <a:spAutoFit/>
+          </a:bodyPr>
+          <a:lstStyle/>
+          <a:p>
+            <a:r>
+              <a:rPr lang="fr-FR" dirty="0">
+                <a:solidFill>
+                  <a:srgbClr val="C00000"/>
+                </a:solidFill>
+              </a:rPr>
+              <a:t>BC + =&gt; +++</a:t>
+            </a:r>
+          </a:p>
+          <a:p>
+            <a:pPr marL="285750" indent="-285750">
+              <a:buFont typeface="Arial" panose="020B0604020202020204" pitchFamily="34" charset="0"/>
+              <a:buChar char="•"/>
+            </a:pPr>
+            <a:r>
+              <a:rPr lang="fr-FR" dirty="0">
+                <a:solidFill>
+                  <a:srgbClr val="C00000"/>
+                </a:solidFill>
+              </a:rPr>
+              <a:t>Evolution </a:t>
+            </a:r>
+          </a:p>
+          <a:p>
+            <a:pPr marL="742950" lvl="1" indent="-285750">
+              <a:buFont typeface="Arial" panose="020B0604020202020204" pitchFamily="34" charset="0"/>
+              <a:buChar char="•"/>
+            </a:pPr>
+            <a:r>
+              <a:rPr lang="fr-FR" dirty="0">
+                <a:solidFill>
+                  <a:srgbClr val="C00000"/>
+                </a:solidFill>
+              </a:rPr>
+              <a:t>Du contenu du BC</a:t>
+            </a:r>
+          </a:p>
+          <a:p>
+            <a:pPr marL="742950" lvl="1" indent="-285750">
+              <a:buFont typeface="Arial" panose="020B0604020202020204" pitchFamily="34" charset="0"/>
+              <a:buChar char="•"/>
+            </a:pPr>
+            <a:r>
+              <a:rPr lang="fr-FR" dirty="0">
+                <a:solidFill>
+                  <a:srgbClr val="C00000"/>
+                </a:solidFill>
+              </a:rPr>
+              <a:t>De la progression des exercices (initiation, perfectionnement et maitrise)</a:t>
             </a:r>
           </a:p>
         </p:txBody>
@@ -5673,8 +5785,8 @@
         </p:nvSpPr>
         <p:spPr>
           <a:xfrm>
-            <a:off x="115703" y="135108"/>
-            <a:ext cx="5195334" cy="3570208"/>
+            <a:off x="128229" y="736358"/>
+            <a:ext cx="5195334" cy="4801314"/>
           </a:xfrm>
           <a:prstGeom prst="rect">
             <a:avLst/>
@@ -5736,6 +5848,26 @@
             </a:r>
           </a:p>
           <a:p>
+            <a:pPr marL="742950" lvl="1" indent="-285750">
+              <a:buFont typeface="Arial" panose="020B0604020202020204" pitchFamily="34" charset="0"/>
+              <a:buChar char="•"/>
+            </a:pPr>
+            <a:r>
+              <a:rPr lang="fr-FR" sz="1600" dirty="0"/>
+              <a:t>En mer méditerranée</a:t>
+            </a:r>
+          </a:p>
+          <a:p>
+            <a:pPr marL="742950" lvl="1" indent="-285750">
+              <a:buFont typeface="Arial" panose="020B0604020202020204" pitchFamily="34" charset="0"/>
+              <a:buChar char="•"/>
+            </a:pPr>
+            <a:r>
+              <a:rPr lang="fr-FR" sz="1600" dirty="0"/>
+              <a:t>Bateau: Barge avec deux échelles à l’arrière</a:t>
+            </a:r>
+          </a:p>
+          <a:p>
             <a:pPr marL="285750" indent="-285750">
               <a:buFont typeface="Arial" panose="020B0604020202020204" pitchFamily="34" charset="0"/>
               <a:buChar char="•"/>
@@ -5835,6 +5967,36 @@
               <a:t>Voiture</a:t>
             </a:r>
           </a:p>
+          <a:p>
+            <a:pPr marL="285750" indent="-285750">
+              <a:buFont typeface="Arial" panose="020B0604020202020204" pitchFamily="34" charset="0"/>
+              <a:buChar char="•"/>
+            </a:pPr>
+            <a:r>
+              <a:rPr lang="fr-FR" sz="1600" dirty="0"/>
+              <a:t>Ma position</a:t>
+            </a:r>
+          </a:p>
+          <a:p>
+            <a:pPr marL="742950" lvl="1" indent="-285750">
+              <a:buFont typeface="Arial" panose="020B0604020202020204" pitchFamily="34" charset="0"/>
+              <a:buChar char="•"/>
+            </a:pPr>
+            <a:r>
+              <a:rPr lang="fr-FR" sz="1600" dirty="0"/>
+              <a:t>E3 / DP du séjour</a:t>
+            </a:r>
+          </a:p>
+          <a:p>
+            <a:pPr marL="742950" lvl="1" indent="-285750">
+              <a:buFont typeface="Arial" panose="020B0604020202020204" pitchFamily="34" charset="0"/>
+              <a:buChar char="•"/>
+            </a:pPr>
+            <a:r>
+              <a:rPr lang="fr-FR" sz="1600" dirty="0"/>
+              <a:t>Délègue la formation à 2 E2</a:t>
+            </a:r>
+          </a:p>
         </p:txBody>
       </p:sp>
       <p:sp>
@@ -5851,7 +6013,7 @@
         </p:nvSpPr>
         <p:spPr>
           <a:xfrm>
-            <a:off x="115703" y="4377672"/>
+            <a:off x="8858869" y="758732"/>
             <a:ext cx="2585066" cy="2092881"/>
           </a:xfrm>
           <a:prstGeom prst="rect">
@@ -5880,7 +6042,7 @@
             <a:pPr algn="ctr"/>
             <a:r>
               <a:rPr lang="fr-FR" b="1" dirty="0"/>
-              <a:t>Site: Petit chaudron</a:t>
+              <a:t>Site 1: Petit chaudron</a:t>
             </a:r>
           </a:p>
           <a:p>
@@ -5942,6 +6104,295 @@
               <a:rPr lang="fr-FR" sz="1600" dirty="0"/>
               <a:t>Pas de courant</a:t>
             </a:r>
+          </a:p>
+        </p:txBody>
+      </p:sp>
+      <p:sp>
+        <p:nvSpPr>
+          <p:cNvPr id="2" name="ZoneTexte 1">
+            <a:extLst>
+              <a:ext uri="{FF2B5EF4-FFF2-40B4-BE49-F238E27FC236}">
+                <a16:creationId xmlns:a16="http://schemas.microsoft.com/office/drawing/2014/main" id="{76831BEB-1731-45C3-3685-3825998EEE89}"/>
+              </a:ext>
+            </a:extLst>
+          </p:cNvPr>
+          <p:cNvSpPr txBox="1"/>
+          <p:nvPr/>
+        </p:nvSpPr>
+        <p:spPr>
+          <a:xfrm>
+            <a:off x="5561374" y="736358"/>
+            <a:ext cx="3059684" cy="5293757"/>
+          </a:xfrm>
+          <a:prstGeom prst="rect">
+            <a:avLst/>
+          </a:prstGeom>
+          <a:solidFill>
+            <a:schemeClr val="accent2">
+              <a:lumMod val="20000"/>
+              <a:lumOff val="80000"/>
+            </a:schemeClr>
+          </a:solidFill>
+          <a:ln>
+            <a:solidFill>
+              <a:schemeClr val="accent2">
+                <a:lumMod val="75000"/>
+              </a:schemeClr>
+            </a:solidFill>
+          </a:ln>
+        </p:spPr>
+        <p:txBody>
+          <a:bodyPr wrap="none" rtlCol="0">
+            <a:spAutoFit/>
+          </a:bodyPr>
+          <a:lstStyle/>
+          <a:p>
+            <a:pPr algn="ctr"/>
+            <a:r>
+              <a:rPr lang="fr-FR" b="1" dirty="0"/>
+              <a:t>Présentation</a:t>
+            </a:r>
+          </a:p>
+          <a:p>
+            <a:pPr marL="285750" indent="-285750">
+              <a:buFont typeface="Arial" panose="020B0604020202020204" pitchFamily="34" charset="0"/>
+              <a:buChar char="•"/>
+            </a:pPr>
+            <a:r>
+              <a:rPr lang="fr-FR" sz="1600" dirty="0"/>
+              <a:t>Séjour</a:t>
+            </a:r>
+          </a:p>
+          <a:p>
+            <a:pPr marL="742950" lvl="1" indent="-285750">
+              <a:buFont typeface="Arial" panose="020B0604020202020204" pitchFamily="34" charset="0"/>
+              <a:buChar char="•"/>
+            </a:pPr>
+            <a:r>
+              <a:rPr lang="fr-FR" sz="1600" dirty="0"/>
+              <a:t>Objet</a:t>
+            </a:r>
+          </a:p>
+          <a:p>
+            <a:pPr marL="742950" lvl="1" indent="-285750">
+              <a:buFont typeface="Arial" panose="020B0604020202020204" pitchFamily="34" charset="0"/>
+              <a:buChar char="•"/>
+            </a:pPr>
+            <a:r>
+              <a:rPr lang="fr-FR" sz="1600" dirty="0"/>
+              <a:t>Lieu</a:t>
+            </a:r>
+          </a:p>
+          <a:p>
+            <a:pPr marL="742950" lvl="1" indent="-285750">
+              <a:buFont typeface="Arial" panose="020B0604020202020204" pitchFamily="34" charset="0"/>
+              <a:buChar char="•"/>
+            </a:pPr>
+            <a:r>
+              <a:rPr lang="fr-FR" sz="1600" dirty="0"/>
+              <a:t>Transport</a:t>
+            </a:r>
+          </a:p>
+          <a:p>
+            <a:pPr marL="742950" lvl="1" indent="-285750">
+              <a:buFont typeface="Arial" panose="020B0604020202020204" pitchFamily="34" charset="0"/>
+              <a:buChar char="•"/>
+            </a:pPr>
+            <a:r>
+              <a:rPr lang="fr-FR" sz="1600" dirty="0"/>
+              <a:t>Participants</a:t>
+            </a:r>
+          </a:p>
+          <a:p>
+            <a:pPr marL="285750" indent="-285750">
+              <a:buFont typeface="Arial" panose="020B0604020202020204" pitchFamily="34" charset="0"/>
+              <a:buChar char="•"/>
+            </a:pPr>
+            <a:r>
+              <a:rPr lang="fr-FR" sz="1600" dirty="0"/>
+              <a:t>Déroulement N1</a:t>
+            </a:r>
+          </a:p>
+          <a:p>
+            <a:pPr marL="742950" lvl="1" indent="-285750">
+              <a:buFont typeface="Arial" panose="020B0604020202020204" pitchFamily="34" charset="0"/>
+              <a:buChar char="•"/>
+            </a:pPr>
+            <a:r>
+              <a:rPr lang="fr-FR" sz="1600" dirty="0"/>
+              <a:t>Vendredi</a:t>
+            </a:r>
+          </a:p>
+          <a:p>
+            <a:pPr marL="1200150" lvl="2" indent="-285750">
+              <a:buFont typeface="Arial" panose="020B0604020202020204" pitchFamily="34" charset="0"/>
+              <a:buChar char="•"/>
+            </a:pPr>
+            <a:r>
+              <a:rPr lang="fr-FR" sz="1600" dirty="0"/>
+              <a:t>Voyage</a:t>
+            </a:r>
+          </a:p>
+          <a:p>
+            <a:pPr marL="1200150" lvl="2" indent="-285750">
+              <a:buFont typeface="Arial" panose="020B0604020202020204" pitchFamily="34" charset="0"/>
+              <a:buChar char="•"/>
+            </a:pPr>
+            <a:r>
+              <a:rPr lang="fr-FR" sz="1600" dirty="0"/>
+              <a:t>Accueil</a:t>
+            </a:r>
+          </a:p>
+          <a:p>
+            <a:pPr marL="1200150" lvl="2" indent="-285750">
+              <a:buFont typeface="Arial" panose="020B0604020202020204" pitchFamily="34" charset="0"/>
+              <a:buChar char="•"/>
+            </a:pPr>
+            <a:r>
+              <a:rPr lang="fr-FR" sz="1600" dirty="0"/>
+              <a:t>Matériel</a:t>
+            </a:r>
+          </a:p>
+          <a:p>
+            <a:pPr marL="742950" lvl="1" indent="-285750">
+              <a:buFont typeface="Arial" panose="020B0604020202020204" pitchFamily="34" charset="0"/>
+              <a:buChar char="•"/>
+            </a:pPr>
+            <a:r>
+              <a:rPr lang="fr-FR" sz="1600" dirty="0"/>
+              <a:t>Samedi</a:t>
+            </a:r>
+          </a:p>
+          <a:p>
+            <a:pPr marL="1200150" lvl="2" indent="-285750">
+              <a:buFont typeface="Arial" panose="020B0604020202020204" pitchFamily="34" charset="0"/>
+              <a:buChar char="•"/>
+            </a:pPr>
+            <a:r>
+              <a:rPr lang="fr-FR" sz="1600" dirty="0"/>
+              <a:t>formation</a:t>
+            </a:r>
+          </a:p>
+          <a:p>
+            <a:pPr marL="742950" lvl="1" indent="-285750">
+              <a:buFont typeface="Arial" panose="020B0604020202020204" pitchFamily="34" charset="0"/>
+              <a:buChar char="•"/>
+            </a:pPr>
+            <a:r>
+              <a:rPr lang="fr-FR" sz="1600" dirty="0"/>
+              <a:t>Dimanche</a:t>
+            </a:r>
+          </a:p>
+          <a:p>
+            <a:pPr marL="1200150" lvl="2" indent="-285750">
+              <a:buFont typeface="Arial" panose="020B0604020202020204" pitchFamily="34" charset="0"/>
+              <a:buChar char="•"/>
+            </a:pPr>
+            <a:r>
+              <a:rPr lang="fr-FR" sz="1600" dirty="0"/>
+              <a:t>formation</a:t>
+            </a:r>
+          </a:p>
+          <a:p>
+            <a:pPr marL="742950" lvl="1" indent="-285750">
+              <a:buFont typeface="Arial" panose="020B0604020202020204" pitchFamily="34" charset="0"/>
+              <a:buChar char="•"/>
+            </a:pPr>
+            <a:r>
+              <a:rPr lang="fr-FR" sz="1600" dirty="0"/>
+              <a:t>Lundi</a:t>
+            </a:r>
+          </a:p>
+          <a:p>
+            <a:pPr marL="1200150" lvl="2" indent="-285750">
+              <a:buFont typeface="Arial" panose="020B0604020202020204" pitchFamily="34" charset="0"/>
+              <a:buChar char="•"/>
+            </a:pPr>
+            <a:r>
+              <a:rPr lang="fr-FR" sz="1600" dirty="0"/>
+              <a:t>Formation</a:t>
+            </a:r>
+          </a:p>
+          <a:p>
+            <a:pPr marL="1200150" lvl="2" indent="-285750">
+              <a:buFont typeface="Arial" panose="020B0604020202020204" pitchFamily="34" charset="0"/>
+              <a:buChar char="•"/>
+            </a:pPr>
+            <a:r>
+              <a:rPr lang="fr-FR" sz="1600" dirty="0"/>
+              <a:t>Carnet de plongée</a:t>
+            </a:r>
+          </a:p>
+          <a:p>
+            <a:pPr marL="285750" indent="-285750">
+              <a:buFont typeface="Arial" panose="020B0604020202020204" pitchFamily="34" charset="0"/>
+              <a:buChar char="•"/>
+            </a:pPr>
+            <a:r>
+              <a:rPr lang="fr-FR" sz="1600" dirty="0"/>
+              <a:t>Après</a:t>
+            </a:r>
+          </a:p>
+          <a:p>
+            <a:pPr marL="742950" lvl="1" indent="-285750">
+              <a:buFont typeface="Arial" panose="020B0604020202020204" pitchFamily="34" charset="0"/>
+              <a:buChar char="•"/>
+            </a:pPr>
+            <a:r>
+              <a:rPr lang="fr-FR" sz="1600" dirty="0"/>
+              <a:t>Exploration jusqu’à 20m</a:t>
+            </a:r>
+          </a:p>
+          <a:p>
+            <a:pPr marL="742950" lvl="1" indent="-285750">
+              <a:buFont typeface="Arial" panose="020B0604020202020204" pitchFamily="34" charset="0"/>
+              <a:buChar char="•"/>
+            </a:pPr>
+            <a:r>
+              <a:rPr lang="fr-FR" sz="1600" dirty="0"/>
+              <a:t>retour</a:t>
+            </a:r>
+          </a:p>
+        </p:txBody>
+      </p:sp>
+      <p:sp>
+        <p:nvSpPr>
+          <p:cNvPr id="3" name="ZoneTexte 2">
+            <a:extLst>
+              <a:ext uri="{FF2B5EF4-FFF2-40B4-BE49-F238E27FC236}">
+                <a16:creationId xmlns:a16="http://schemas.microsoft.com/office/drawing/2014/main" id="{66FFD4C0-0A88-3D88-3DFE-D637ADE0466F}"/>
+              </a:ext>
+            </a:extLst>
+          </p:cNvPr>
+          <p:cNvSpPr txBox="1"/>
+          <p:nvPr/>
+        </p:nvSpPr>
+        <p:spPr>
+          <a:xfrm>
+            <a:off x="0" y="46903"/>
+            <a:ext cx="12192000" cy="369332"/>
+          </a:xfrm>
+          <a:prstGeom prst="rect">
+            <a:avLst/>
+          </a:prstGeom>
+          <a:noFill/>
+        </p:spPr>
+        <p:txBody>
+          <a:bodyPr wrap="square" rtlCol="0">
+            <a:spAutoFit/>
+          </a:bodyPr>
+          <a:lstStyle/>
+          <a:p>
+            <a:pPr algn="ctr"/>
+            <a:r>
+              <a:rPr lang="fr-FR" dirty="0"/>
+              <a:t>Séjour validation N1 pour 4 baptisés sur 3 jours: Informations diverses </a:t>
+            </a:r>
+            <a:r>
+              <a:rPr lang="fr-FR"/>
+              <a:t>non écrites</a:t>
+            </a:r>
+            <a:endParaRPr lang="fr-FR" dirty="0"/>
           </a:p>
         </p:txBody>
       </p:sp>
